--- a/week-04/presentations/ppts/day-03-mapping-system-components.pptx
+++ b/week-04/presentations/ppts/day-03-mapping-system-components.pptx
@@ -5974,7 +5974,7 @@
             </a:pPr>
             <a:r>
               <a:rPr/>
-              <a:t>🧿 Today’s Two Prompts</a:t>
+              <a:t>🤖 Today’s Two Prompts</a:t>
             </a:r>
           </a:p>
         </p:txBody>
@@ -6356,7 +6356,7 @@
             </a:pPr>
             <a:r>
               <a:rPr/>
-              <a:t>TCD §2 diagram-backed</a:t>
+              <a:t>TCD Section 2 diagram-backed</a:t>
             </a:r>
           </a:p>
           <a:p>
@@ -6710,7 +6710,7 @@
             </a:pPr>
             <a:r>
               <a:rPr/>
-              <a:t>Recap §§1–3; whiteboards / paper out</a:t>
+              <a:t>Recap Sections 1–3; whiteboards / paper out</a:t>
             </a:r>
           </a:p>
           <a:p>

--- a/week-04/presentations/ppts/day-03-mapping-system-components.pptx
+++ b/week-04/presentations/ppts/day-03-mapping-system-components.pptx
@@ -6356,7 +6356,7 @@
             </a:pPr>
             <a:r>
               <a:rPr/>
-              <a:t>TCD Section 2 diagram-backed</a:t>
+              <a:t>Technical Concept Document (TCD) Section 2 diagram-backed</a:t>
             </a:r>
           </a:p>
           <a:p>
@@ -6383,7 +6383,7 @@
             </a:pPr>
             <a:r>
               <a:rPr/>
-              <a:t>SLOs + error budgets</a:t>
+              <a:t>Service Level Objectives (SLOs) + error budgets</a:t>
             </a:r>
           </a:p>
           <a:p>

--- a/week-04/presentations/ppts/day-03-mapping-system-components.pptx
+++ b/week-04/presentations/ppts/day-03-mapping-system-components.pptx
@@ -708,7 +708,7 @@
             </a:pPr>
             <a:r>
               <a:rPr/>
-              <a:t>Note the dashed arrow for async to Kafka. Sync vs async is the most-skipped distinction.</a:t>
+              <a:t>Note the dashed arrow for async to Event Hubs. Sync vs async is the most-skipped distinction.</a:t>
             </a:r>
           </a:p>
         </p:txBody>
@@ -5371,6 +5371,52 @@
           </a:p>
         </p:txBody>
       </p:sp>
+      <p:sp>
+        <p:nvSpPr>
+          <p:cNvPr id="3" name="Content Placeholder 2"/>
+          <p:cNvSpPr>
+            <a:spLocks noGrp="1"/>
+          </p:cNvSpPr>
+          <p:nvPr>
+            <p:ph idx="1"/>
+          </p:nvPr>
+        </p:nvSpPr>
+        <p:spPr/>
+        <p:txBody>
+          <a:bodyPr/>
+          <a:lstStyle/>
+          <a:p>
+            <a:pPr lvl="0" indent="0">
+              <a:buNone/>
+            </a:pPr>
+            <a:r>
+              <a:rPr>
+                <a:latin typeface="Courier"/>
+              </a:rPr>
+              <a:t>[Mobile (Android)]──→  ╔══════════════════════════════╗
+[Mobile (iOS)]    ──→  ║      Backend Monolith         ║
+║                               ║
+║  ┌──────────────────────┐     ║
+║  │ Reconcile module     │     ║
+║  │ (new — owned by us)  │     ║
+║  └──────────────────────┘     ║
+║  ┌──────────────────────┐     ║
+║  │ Tickets module       │     ║
+║  │ (Dispatch team)      │     ║
+║  └──────────────────────┘     ║
+║  ┌──────────────────────┐     ║
+║  │ Auth module          │     ║
+║  │ (Identity team)      │     ║
+║  └──────────────────────┘     ║
+╚════════════╤═══════════════════╝
+↓ sync
+[Postgres primary] → [Read replica]
+⇢ async
+[Event Hubs audit stream] ⇢ [Audit store]</a:t>
+            </a:r>
+          </a:p>
+        </p:txBody>
+      </p:sp>
     </p:spTree>
   </p:cSld>
 </p:sld>
@@ -5669,7 +5715,7 @@
             </a:pPr>
             <a:r>
               <a:rPr/>
-              <a:t>Trace a failure: “What happens when the audit topic is full?” Walk the diagram.</a:t>
+              <a:t>Trace a failure: “What happens when the audit stream is full?” Walk the diagram.</a:t>
             </a:r>
           </a:p>
           <a:p>
@@ -6029,6 +6075,25 @@
               <a:t>“Operations VP — what 5 questions would you ask after seeing this?” Non-engineer questions.</a:t>
             </a:r>
           </a:p>
+          <a:p>
+            <a:pPr lvl="0" indent="0">
+              <a:buNone/>
+            </a:pPr>
+            <a:r>
+              <a:rPr>
+                <a:latin typeface="Courier"/>
+              </a:rPr>
+              <a:t>Role: Principal architect reviewing a feature's C4 Container diagram.
+Context: &lt;plain-text description: containers + tech + arrows + owners&gt;
+Stance: &lt;copy from TCD Section 1&gt;
+Task: Identify the top 3 issues. For each, name the specific scenario.
+Constraints:
+- Treat ownership and tech as given, not as targets
+- Flag any unstated assumption
+- Do not suggest generic 'modernization'
+Format: Numbered list — Issue / Scenario / Suggested clarification.</a:t>
+            </a:r>
+          </a:p>
         </p:txBody>
       </p:sp>
     </p:spTree>
@@ -7328,6 +7393,23 @@
         <p:txBody>
           <a:bodyPr/>
           <a:lstStyle/>
+          <a:p>
+            <a:pPr lvl="0" indent="0">
+              <a:buNone/>
+            </a:pPr>
+            <a:r>
+              <a:rPr>
+                <a:latin typeface="Courier"/>
+              </a:rPr>
+              <a:t>Legend
+- ◻ Box with no fill   = system / module owned by us
+- ◼ Box with fill      = external system (out of our control)
+- 👤 Stick figure       = person (role)
+- → Solid arrow        = synchronous call
+- ⇢ Dashed arrow       = async / event
+- (label on arrow)     = intent in plain English</a:t>
+            </a:r>
+          </a:p>
           <a:p>
             <a:pPr lvl="0" indent="0" marL="0">
               <a:buNone/>

--- a/week-04/presentations/ppts/day-03-mapping-system-components.pptx
+++ b/week-04/presentations/ppts/day-03-mapping-system-components.pptx
@@ -1118,7 +1118,7 @@
             </a:pPr>
             <a:r>
               <a:rPr/>
-              <a:t>AI gives triads a stand-in architect read. Keep prompts structured — Role / Context / Constraints / Format — and log provenance for anything that lands in the TCD.</a:t>
+              <a:t>AI gives quads a stand-in architect read. Keep prompts structured — Role / Context / Constraints / Format — and log provenance for anything that lands in the TCD.</a:t>
             </a:r>
           </a:p>
         </p:txBody>
@@ -1282,7 +1282,7 @@
             </a:pPr>
             <a:r>
               <a:rPr/>
-              <a:t>Wrap-share: each triad names 1 thing the diagram made explicit, 1 it revealed wrong, 1 it couldn’t answer.</a:t>
+              <a:t>Wrap-share: each quad names 1 thing the diagram made explicit, 1 it revealed wrong, 1 it couldn’t answer.</a:t>
             </a:r>
           </a:p>
         </p:txBody>
@@ -1692,7 +1692,7 @@
             </a:pPr>
             <a:r>
               <a:rPr/>
-              <a:t>TPMs live in C4 Levels 1 and 2 — anything deeper is engineer territory. Make this scope-line explicit before triads draw.</a:t>
+              <a:t>TPMs live in C4 Levels 1 and 2 — anything deeper is engineer territory. Make this scope-line explicit before quads draw.</a:t>
             </a:r>
           </a:p>
         </p:txBody>
@@ -1774,7 +1774,7 @@
             </a:pPr>
             <a:r>
               <a:rPr/>
-              <a:t>Triads who try to draw Component-level diagrams over-step. Coach back to Container.</a:t>
+              <a:t>Quads who try to draw Component-level diagrams over-step. Coach back to Container.</a:t>
             </a:r>
           </a:p>
         </p:txBody>
@@ -2020,7 +2020,7 @@
             </a:pPr>
             <a:r>
               <a:rPr/>
-              <a:t>If a triad’s diagram is “User → System → Database”, they’ve drawn a Container poorly. Coach back.</a:t>
+              <a:t>If a quad’s diagram is “User → System → Database”, they’ve drawn a Container poorly. Coach back.</a:t>
             </a:r>
           </a:p>
         </p:txBody>
@@ -5487,7 +5487,7 @@
             </a:pPr>
             <a:r>
               <a:rPr b="1"/>
-              <a:t>Triads • 40 minutes</a:t>
+              <a:t>Quads • 40 minutes</a:t>
             </a:r>
           </a:p>
           <a:p>
@@ -5835,7 +5835,7 @@
             </a:pPr>
             <a:r>
               <a:rPr b="1"/>
-              <a:t>Triad pairs • 40 minutes</a:t>
+              <a:t>Quad pairs • 40 minutes</a:t>
             </a:r>
           </a:p>
           <a:p>
@@ -6166,7 +6166,7 @@
             </a:pPr>
             <a:r>
               <a:rPr b="1"/>
-              <a:t>Triads • 45 minutes • Wrap</a:t>
+              <a:t>Quads • 45 minutes • Wrap</a:t>
             </a:r>
           </a:p>
           <a:p>
@@ -6658,7 +6658,7 @@
             </a:pPr>
             <a:r>
               <a:rPr/>
-              <a:t>Stress-test the diagrams with another triad and with AI</a:t>
+              <a:t>Stress-test the diagrams with another quad and with AI</a:t>
             </a:r>
           </a:p>
         </p:txBody>
@@ -7491,16 +7491,16 @@
             </a:pPr>
             <a:r>
               <a:rPr b="1"/>
-              <a:t>Triads • 35 minutes</a:t>
-            </a:r>
-          </a:p>
-          <a:p>
-            <a:pPr lvl="0" indent="0" marL="0">
-              <a:buNone/>
-            </a:pPr>
-            <a:r>
-              <a:rPr/>
-              <a:t>List people; list externals; draw it; legend; 60-second test with another triad.</a:t>
+              <a:t>Quads • 35 minutes</a:t>
+            </a:r>
+          </a:p>
+          <a:p>
+            <a:pPr lvl="0" indent="0" marL="0">
+              <a:buNone/>
+            </a:pPr>
+            <a:r>
+              <a:rPr/>
+              <a:t>List people; list externals; draw it; legend; 60-second test with another quad.</a:t>
             </a:r>
           </a:p>
           <a:p>
@@ -7545,7 +7545,7 @@
             </a:pPr>
             <a:r>
               <a:rPr/>
-              <a:t>5 min: 60-sec walk-through with another triad</a:t>
+              <a:t>5 min: 60-sec walk-through with another quad</a:t>
             </a:r>
           </a:p>
           <a:p>

--- a/week-04/presentations/ppts/day-03-mapping-system-components.pptx
+++ b/week-04/presentations/ppts/day-03-mapping-system-components.pptx
@@ -5487,7 +5487,7 @@
             </a:pPr>
             <a:r>
               <a:rPr b="1"/>
-              <a:t>Quads • 40 minutes</a:t>
+              <a:t>Quads • 50 minutes</a:t>
             </a:r>
           </a:p>
           <a:p>
@@ -5835,7 +5835,7 @@
             </a:pPr>
             <a:r>
               <a:rPr b="1"/>
-              <a:t>Quad pairs • 40 minutes</a:t>
+              <a:t>Quad pairs • 50 minutes</a:t>
             </a:r>
           </a:p>
           <a:p>
@@ -6166,7 +6166,7 @@
             </a:pPr>
             <a:r>
               <a:rPr b="1"/>
-              <a:t>Quads • 45 minutes • Wrap</a:t>
+              <a:t>Quads • 55 minutes • Wrap</a:t>
             </a:r>
           </a:p>
           <a:p>
@@ -7491,7 +7491,7 @@
             </a:pPr>
             <a:r>
               <a:rPr b="1"/>
-              <a:t>Quads • 35 minutes</a:t>
+              <a:t>Quads • 45 minutes</a:t>
             </a:r>
           </a:p>
           <a:p>

--- a/week-04/presentations/ppts/day-03-mapping-system-components.pptx
+++ b/week-04/presentations/ppts/day-03-mapping-system-components.pptx
@@ -5514,7 +5514,7 @@
             </a:pPr>
             <a:r>
               <a:rPr/>
-              <a:t>15 min: draw containers + protocol-labeled arrows</a:t>
+              <a:t>25 min: draw containers + protocol-labeled arrows</a:t>
             </a:r>
           </a:p>
           <a:p>
@@ -5541,7 +5541,7 @@
             </a:pPr>
             <a:r>
               <a:rPr/>
-              <a:t>⏱ 10 + 15 + 10 + 5</a:t>
+              <a:t>⏱ 10 + 25 + 10 + 5</a:t>
             </a:r>
           </a:p>
         </p:txBody>
@@ -5862,7 +5862,7 @@
             </a:pPr>
             <a:r>
               <a:rPr/>
-              <a:t>10 min: failure trace (one scenario aloud)</a:t>
+              <a:t>20 min: failure trace (one scenario aloud)</a:t>
             </a:r>
           </a:p>
           <a:p>
@@ -5898,7 +5898,7 @@
             </a:pPr>
             <a:r>
               <a:rPr/>
-              <a:t>⏱ 5 + 10 + 10 + 10 + 5</a:t>
+              <a:t>⏱ 5 + 20 + 10 + 10 + 5</a:t>
             </a:r>
           </a:p>
         </p:txBody>
@@ -6184,7 +6184,7 @@
             </a:pPr>
             <a:r>
               <a:rPr/>
-              <a:t>10 min: Prompt A → 3 issues</a:t>
+              <a:t>20 min: Prompt A → 3 issues</a:t>
             </a:r>
           </a:p>
           <a:p>
@@ -6229,7 +6229,7 @@
             </a:pPr>
             <a:r>
               <a:rPr/>
-              <a:t>⏱ 10 + 10 + 10 + 10 + 5 · 15-min wrap</a:t>
+              <a:t>⏱ 20 + 10 + 10 + 10 + 5 · 15-min wrap</a:t>
             </a:r>
           </a:p>
         </p:txBody>
@@ -7527,7 +7527,7 @@
             </a:pPr>
             <a:r>
               <a:rPr/>
-              <a:t>15 min: draw on whiteboard / paper</a:t>
+              <a:t>25 min: draw on whiteboard / paper</a:t>
             </a:r>
           </a:p>
           <a:p>
@@ -7554,7 +7554,7 @@
             </a:pPr>
             <a:r>
               <a:rPr/>
-              <a:t>⏱ 5 + 5 + 15 + 5 + 5</a:t>
+              <a:t>⏱ 5 + 5 + 25 + 5 + 5</a:t>
             </a:r>
           </a:p>
         </p:txBody>
